--- a/Capstone Design Poster 25-26.pptx
+++ b/Capstone Design Poster 25-26.pptx
@@ -5,35 +5,27 @@
     <p:sldMasterId id="2147483659" r:id="rId1"/>
   </p:sldMasterIdLst>
   <p:notesMasterIdLst>
-    <p:notesMasterId r:id="rId4"/>
+    <p:notesMasterId r:id="rId3"/>
   </p:notesMasterIdLst>
   <p:sldIdLst>
-    <p:sldId id="256" r:id="rId2"/>
-    <p:sldId id="259" r:id="rId3"/>
+    <p:sldId id="259" r:id="rId2"/>
   </p:sldIdLst>
   <p:sldSz cx="43891200" cy="32918400"/>
   <p:notesSz cx="7102475" cy="9388475"/>
   <p:embeddedFontLst>
     <p:embeddedFont>
       <p:font typeface="Consolas" panose="020B0609020204030204" pitchFamily="49" charset="0"/>
-      <p:regular r:id="rId5"/>
-      <p:bold r:id="rId6"/>
-      <p:italic r:id="rId7"/>
-      <p:boldItalic r:id="rId8"/>
+      <p:regular r:id="rId4"/>
+      <p:bold r:id="rId5"/>
+      <p:italic r:id="rId6"/>
+      <p:boldItalic r:id="rId7"/>
     </p:embeddedFont>
     <p:embeddedFont>
-      <p:font typeface="Roboto" panose="02000000000000000000" pitchFamily="2" charset="0"/>
-      <p:regular r:id="rId9"/>
-      <p:bold r:id="rId10"/>
-      <p:italic r:id="rId11"/>
-      <p:boldItalic r:id="rId12"/>
-    </p:embeddedFont>
-    <p:embeddedFont>
-      <p:font typeface="Roboto Condensed ExtraBold" panose="02000000000000000000" pitchFamily="2" charset="0"/>
-      <p:regular r:id="rId13"/>
-      <p:bold r:id="rId14"/>
-      <p:italic r:id="rId15"/>
-      <p:boldItalic r:id="rId16"/>
+      <p:font typeface="Roboto Condensed ExtraBold" panose="020B0604020202020204" charset="0"/>
+      <p:regular r:id="rId8"/>
+      <p:bold r:id="rId9"/>
+      <p:italic r:id="rId10"/>
+      <p:boldItalic r:id="rId11"/>
     </p:embeddedFont>
   </p:embeddedFontLst>
   <p:defaultTextStyle>
@@ -292,6 +284,7 @@
 <file path=ppt/revisionInfo.xml><?xml version="1.0" encoding="utf-8"?>
 <p1510:revInfo xmlns:a="http://schemas.openxmlformats.org/drawingml/2006/main" xmlns:r="http://schemas.openxmlformats.org/officeDocument/2006/relationships" xmlns:p1510="http://schemas.microsoft.com/office/powerpoint/2015/10/main">
   <p1510:revLst>
+    <p1510:client id="{9B041530-867F-3DF8-F63F-EC4F0E1FBCFF}" v="1519" dt="2025-11-14T23:10:21.454"/>
     <p1510:client id="{B6CE303D-6B7C-4806-AE57-4B232086ED5A}" v="6" dt="2025-11-13T17:45:35.215"/>
     <p1510:client id="{C4815F6D-1D4B-4F27-9EE3-D2A37B638CF1}" v="77" dt="2025-11-13T17:42:49.377"/>
   </p1510:revLst>
@@ -740,104 +733,6 @@
 </file>
 
 <file path=ppt/notesSlides/notesSlide1.xml><?xml version="1.0" encoding="utf-8"?>
-<p:notes xmlns:a="http://schemas.openxmlformats.org/drawingml/2006/main" xmlns:r="http://schemas.openxmlformats.org/officeDocument/2006/relationships" xmlns:p="http://schemas.openxmlformats.org/presentationml/2006/main" showMasterSp="0" showMasterPhAnim="0">
-  <p:cSld>
-    <p:spTree>
-      <p:nvGrpSpPr>
-        <p:cNvPr id="1" name="Shape 50"/>
-        <p:cNvGrpSpPr/>
-        <p:nvPr/>
-      </p:nvGrpSpPr>
-      <p:grpSpPr>
-        <a:xfrm>
-          <a:off x="0" y="0"/>
-          <a:ext cx="0" cy="0"/>
-          <a:chOff x="0" y="0"/>
-          <a:chExt cx="0" cy="0"/>
-        </a:xfrm>
-      </p:grpSpPr>
-      <p:sp>
-        <p:nvSpPr>
-          <p:cNvPr id="51" name="Google Shape;51;g38c7d51fe05_0_21:notes"/>
-          <p:cNvSpPr>
-            <a:spLocks noGrp="1" noRot="1" noChangeAspect="1"/>
-          </p:cNvSpPr>
-          <p:nvPr>
-            <p:ph type="sldImg" idx="2"/>
-          </p:nvPr>
-        </p:nvSpPr>
-        <p:spPr>
-          <a:xfrm>
-            <a:off x="1204913" y="704850"/>
-            <a:ext cx="4692650" cy="3519488"/>
-          </a:xfrm>
-          <a:custGeom>
-            <a:avLst/>
-            <a:gdLst/>
-            <a:ahLst/>
-            <a:cxnLst/>
-            <a:rect l="l" t="t" r="r" b="b"/>
-            <a:pathLst>
-              <a:path w="120000" h="120000" extrusionOk="0">
-                <a:moveTo>
-                  <a:pt x="0" y="0"/>
-                </a:moveTo>
-                <a:lnTo>
-                  <a:pt x="120000" y="0"/>
-                </a:lnTo>
-                <a:lnTo>
-                  <a:pt x="120000" y="120000"/>
-                </a:lnTo>
-                <a:lnTo>
-                  <a:pt x="0" y="120000"/>
-                </a:lnTo>
-                <a:close/>
-              </a:path>
-            </a:pathLst>
-          </a:custGeom>
-        </p:spPr>
-      </p:sp>
-      <p:sp>
-        <p:nvSpPr>
-          <p:cNvPr id="52" name="Google Shape;52;g38c7d51fe05_0_21:notes"/>
-          <p:cNvSpPr txBox="1">
-            <a:spLocks noGrp="1"/>
-          </p:cNvSpPr>
-          <p:nvPr>
-            <p:ph type="body" idx="1"/>
-          </p:nvPr>
-        </p:nvSpPr>
-        <p:spPr>
-          <a:xfrm>
-            <a:off x="710248" y="4459526"/>
-            <a:ext cx="5681980" cy="4224814"/>
-          </a:xfrm>
-          <a:prstGeom prst="rect">
-            <a:avLst/>
-          </a:prstGeom>
-        </p:spPr>
-        <p:txBody>
-          <a:bodyPr spcFirstLastPara="1" wrap="square" lIns="94213" tIns="94213" rIns="94213" bIns="94213" anchor="t" anchorCtr="0">
-            <a:noAutofit/>
-          </a:bodyPr>
-          <a:lstStyle/>
-          <a:p>
-            <a:pPr marL="0" indent="0">
-              <a:buNone/>
-            </a:pPr>
-            <a:endParaRPr/>
-          </a:p>
-        </p:txBody>
-      </p:sp>
-    </p:spTree>
-  </p:cSld>
-  <p:clrMapOvr>
-    <a:masterClrMapping/>
-  </p:clrMapOvr>
-</p:notes>
-</file>
-
-<file path=ppt/notesSlides/notesSlide2.xml><?xml version="1.0" encoding="utf-8"?>
 <p:notes xmlns:a="http://schemas.openxmlformats.org/drawingml/2006/main" xmlns:r="http://schemas.openxmlformats.org/officeDocument/2006/relationships" xmlns:p="http://schemas.openxmlformats.org/presentationml/2006/main" showMasterSp="0" showMasterPhAnim="0">
   <p:cSld>
     <p:spTree>
@@ -5297,453 +5192,6 @@
 <file path=ppt/slides/slide1.xml><?xml version="1.0" encoding="utf-8"?>
 <p:sld xmlns:a="http://schemas.openxmlformats.org/drawingml/2006/main" xmlns:r="http://schemas.openxmlformats.org/officeDocument/2006/relationships" xmlns:p="http://schemas.openxmlformats.org/presentationml/2006/main">
   <p:cSld>
-    <p:spTree>
-      <p:nvGrpSpPr>
-        <p:cNvPr id="1" name="Shape 53"/>
-        <p:cNvGrpSpPr/>
-        <p:nvPr/>
-      </p:nvGrpSpPr>
-      <p:grpSpPr>
-        <a:xfrm>
-          <a:off x="0" y="0"/>
-          <a:ext cx="0" cy="0"/>
-          <a:chOff x="0" y="0"/>
-          <a:chExt cx="0" cy="0"/>
-        </a:xfrm>
-      </p:grpSpPr>
-      <p:sp>
-        <p:nvSpPr>
-          <p:cNvPr id="54" name="Google Shape;54;p13"/>
-          <p:cNvSpPr txBox="1">
-            <a:spLocks noGrp="1"/>
-          </p:cNvSpPr>
-          <p:nvPr>
-            <p:ph type="title"/>
-          </p:nvPr>
-        </p:nvSpPr>
-        <p:spPr>
-          <a:xfrm>
-            <a:off x="1496160" y="2848160"/>
-            <a:ext cx="40899000" cy="3665400"/>
-          </a:xfrm>
-          <a:prstGeom prst="rect">
-            <a:avLst/>
-          </a:prstGeom>
-        </p:spPr>
-        <p:txBody>
-          <a:bodyPr spcFirstLastPara="1" wrap="square" lIns="487600" tIns="487600" rIns="487600" bIns="487600" anchor="t" anchorCtr="0">
-            <a:normAutofit/>
-          </a:bodyPr>
-          <a:lstStyle/>
-          <a:p>
-            <a:pPr marL="0" lvl="0" indent="0" algn="l" rtl="0">
-              <a:spcBef>
-                <a:spcPts val="0"/>
-              </a:spcBef>
-              <a:spcAft>
-                <a:spcPts val="0"/>
-              </a:spcAft>
-              <a:buNone/>
-            </a:pPr>
-            <a:r>
-              <a:rPr lang="en" b="1">
-                <a:solidFill>
-                  <a:srgbClr val="FF0000"/>
-                </a:solidFill>
-              </a:rPr>
-              <a:t>How to use this slide deck template</a:t>
-            </a:r>
-            <a:endParaRPr b="1">
-              <a:solidFill>
-                <a:srgbClr val="FF0000"/>
-              </a:solidFill>
-            </a:endParaRPr>
-          </a:p>
-        </p:txBody>
-      </p:sp>
-      <p:sp>
-        <p:nvSpPr>
-          <p:cNvPr id="55" name="Google Shape;55;p13"/>
-          <p:cNvSpPr txBox="1">
-            <a:spLocks noGrp="1"/>
-          </p:cNvSpPr>
-          <p:nvPr>
-            <p:ph type="body" idx="1"/>
-          </p:nvPr>
-        </p:nvSpPr>
-        <p:spPr>
-          <a:xfrm>
-            <a:off x="1496160" y="7375840"/>
-            <a:ext cx="40899000" cy="21864900"/>
-          </a:xfrm>
-          <a:prstGeom prst="rect">
-            <a:avLst/>
-          </a:prstGeom>
-        </p:spPr>
-        <p:txBody>
-          <a:bodyPr spcFirstLastPara="1" wrap="square" lIns="487600" tIns="487600" rIns="487600" bIns="487600" anchor="t" anchorCtr="0">
-            <a:normAutofit fontScale="92500" lnSpcReduction="20000"/>
-          </a:bodyPr>
-          <a:lstStyle/>
-          <a:p>
-            <a:pPr marL="457200" lvl="0" indent="-838200" algn="l" rtl="0">
-              <a:lnSpc>
-                <a:spcPct val="200000"/>
-              </a:lnSpc>
-              <a:spcBef>
-                <a:spcPts val="0"/>
-              </a:spcBef>
-              <a:spcAft>
-                <a:spcPts val="0"/>
-              </a:spcAft>
-              <a:buClr>
-                <a:schemeClr val="dk1"/>
-              </a:buClr>
-              <a:buSzPts val="9600"/>
-              <a:buFont typeface="Roboto"/>
-              <a:buChar char="●"/>
-            </a:pPr>
-            <a:r>
-              <a:rPr lang="en" dirty="0">
-                <a:solidFill>
-                  <a:schemeClr val="dk1"/>
-                </a:solidFill>
-                <a:latin typeface="Roboto"/>
-                <a:ea typeface="Roboto"/>
-                <a:cs typeface="Roboto"/>
-                <a:sym typeface="Roboto"/>
-              </a:rPr>
-              <a:t>Make a copy of this document</a:t>
-            </a:r>
-            <a:endParaRPr dirty="0">
-              <a:solidFill>
-                <a:schemeClr val="dk1"/>
-              </a:solidFill>
-              <a:latin typeface="Roboto"/>
-              <a:ea typeface="Roboto"/>
-              <a:cs typeface="Roboto"/>
-              <a:sym typeface="Roboto"/>
-            </a:endParaRPr>
-          </a:p>
-          <a:p>
-            <a:pPr marL="457200" lvl="0" indent="-838200" algn="l" rtl="0">
-              <a:lnSpc>
-                <a:spcPct val="200000"/>
-              </a:lnSpc>
-              <a:spcBef>
-                <a:spcPts val="0"/>
-              </a:spcBef>
-              <a:spcAft>
-                <a:spcPts val="0"/>
-              </a:spcAft>
-              <a:buClr>
-                <a:schemeClr val="dk1"/>
-              </a:buClr>
-              <a:buSzPts val="9600"/>
-              <a:buFont typeface="Roboto"/>
-              <a:buChar char="●"/>
-            </a:pPr>
-            <a:r>
-              <a:rPr lang="en" dirty="0">
-                <a:solidFill>
-                  <a:schemeClr val="dk1"/>
-                </a:solidFill>
-                <a:latin typeface="Roboto"/>
-                <a:ea typeface="Roboto"/>
-                <a:cs typeface="Roboto"/>
-                <a:sym typeface="Roboto"/>
-              </a:rPr>
-              <a:t>Edit the appropriate slide for your department’s project</a:t>
-            </a:r>
-            <a:endParaRPr dirty="0">
-              <a:solidFill>
-                <a:schemeClr val="dk1"/>
-              </a:solidFill>
-              <a:latin typeface="Roboto"/>
-              <a:ea typeface="Roboto"/>
-              <a:cs typeface="Roboto"/>
-              <a:sym typeface="Roboto"/>
-            </a:endParaRPr>
-          </a:p>
-          <a:p>
-            <a:pPr marL="457200" lvl="0" indent="-838200" algn="l" rtl="0">
-              <a:lnSpc>
-                <a:spcPct val="200000"/>
-              </a:lnSpc>
-              <a:spcBef>
-                <a:spcPts val="0"/>
-              </a:spcBef>
-              <a:spcAft>
-                <a:spcPts val="0"/>
-              </a:spcAft>
-              <a:buClr>
-                <a:schemeClr val="dk1"/>
-              </a:buClr>
-              <a:buSzPts val="9600"/>
-              <a:buFont typeface="Roboto"/>
-              <a:buChar char="●"/>
-            </a:pPr>
-            <a:r>
-              <a:rPr lang="en" dirty="0">
-                <a:solidFill>
-                  <a:schemeClr val="dk1"/>
-                </a:solidFill>
-                <a:latin typeface="Roboto"/>
-                <a:ea typeface="Roboto"/>
-                <a:cs typeface="Roboto"/>
-                <a:sym typeface="Roboto"/>
-              </a:rPr>
-              <a:t>Edit the year and project number in the top right corner</a:t>
-            </a:r>
-            <a:endParaRPr dirty="0">
-              <a:solidFill>
-                <a:schemeClr val="dk1"/>
-              </a:solidFill>
-              <a:latin typeface="Roboto"/>
-              <a:ea typeface="Roboto"/>
-              <a:cs typeface="Roboto"/>
-              <a:sym typeface="Roboto"/>
-            </a:endParaRPr>
-          </a:p>
-          <a:p>
-            <a:pPr marL="914400" lvl="1" indent="-702733" algn="l" rtl="0">
-              <a:lnSpc>
-                <a:spcPct val="200000"/>
-              </a:lnSpc>
-              <a:spcBef>
-                <a:spcPts val="0"/>
-              </a:spcBef>
-              <a:spcAft>
-                <a:spcPts val="0"/>
-              </a:spcAft>
-              <a:buClr>
-                <a:schemeClr val="dk1"/>
-              </a:buClr>
-              <a:buSzPts val="7467"/>
-              <a:buFont typeface="Roboto"/>
-              <a:buChar char="○"/>
-            </a:pPr>
-            <a:r>
-              <a:rPr lang="en" dirty="0">
-                <a:solidFill>
-                  <a:schemeClr val="dk1"/>
-                </a:solidFill>
-                <a:latin typeface="Roboto"/>
-                <a:ea typeface="Roboto"/>
-                <a:cs typeface="Roboto"/>
-                <a:sym typeface="Roboto"/>
-              </a:rPr>
-              <a:t>Font family is “Roboto Condensed - Extra Bold”</a:t>
-            </a:r>
-            <a:endParaRPr dirty="0">
-              <a:solidFill>
-                <a:schemeClr val="dk1"/>
-              </a:solidFill>
-              <a:latin typeface="Roboto"/>
-              <a:ea typeface="Roboto"/>
-              <a:cs typeface="Roboto"/>
-              <a:sym typeface="Roboto"/>
-            </a:endParaRPr>
-          </a:p>
-          <a:p>
-            <a:pPr marL="914400" lvl="1" indent="-702733" algn="l" rtl="0">
-              <a:lnSpc>
-                <a:spcPct val="200000"/>
-              </a:lnSpc>
-              <a:spcBef>
-                <a:spcPts val="0"/>
-              </a:spcBef>
-              <a:spcAft>
-                <a:spcPts val="0"/>
-              </a:spcAft>
-              <a:buClr>
-                <a:schemeClr val="dk1"/>
-              </a:buClr>
-              <a:buSzPts val="7467"/>
-              <a:buFont typeface="Roboto"/>
-              <a:buChar char="○"/>
-            </a:pPr>
-            <a:r>
-              <a:rPr lang="en" dirty="0">
-                <a:solidFill>
-                  <a:schemeClr val="dk1"/>
-                </a:solidFill>
-                <a:latin typeface="Roboto"/>
-                <a:ea typeface="Roboto"/>
-                <a:cs typeface="Roboto"/>
-                <a:sym typeface="Roboto"/>
-              </a:rPr>
-              <a:t>Font size is 100</a:t>
-            </a:r>
-            <a:endParaRPr dirty="0">
-              <a:solidFill>
-                <a:schemeClr val="dk1"/>
-              </a:solidFill>
-              <a:latin typeface="Roboto"/>
-              <a:ea typeface="Roboto"/>
-              <a:cs typeface="Roboto"/>
-              <a:sym typeface="Roboto"/>
-            </a:endParaRPr>
-          </a:p>
-          <a:p>
-            <a:pPr marL="457200" lvl="0" indent="-838200" algn="l" rtl="0">
-              <a:lnSpc>
-                <a:spcPct val="200000"/>
-              </a:lnSpc>
-              <a:spcBef>
-                <a:spcPts val="0"/>
-              </a:spcBef>
-              <a:spcAft>
-                <a:spcPts val="0"/>
-              </a:spcAft>
-              <a:buClr>
-                <a:schemeClr val="dk1"/>
-              </a:buClr>
-              <a:buSzPts val="9600"/>
-              <a:buFont typeface="Roboto"/>
-              <a:buChar char="●"/>
-            </a:pPr>
-            <a:r>
-              <a:rPr lang="en" dirty="0">
-                <a:solidFill>
-                  <a:schemeClr val="dk1"/>
-                </a:solidFill>
-                <a:latin typeface="Roboto"/>
-                <a:ea typeface="Roboto"/>
-                <a:cs typeface="Roboto"/>
-                <a:sym typeface="Roboto"/>
-              </a:rPr>
-              <a:t>Use the guides to properly align your department number</a:t>
-            </a:r>
-            <a:endParaRPr dirty="0">
-              <a:solidFill>
-                <a:schemeClr val="dk1"/>
-              </a:solidFill>
-              <a:latin typeface="Roboto"/>
-              <a:ea typeface="Roboto"/>
-              <a:cs typeface="Roboto"/>
-              <a:sym typeface="Roboto"/>
-            </a:endParaRPr>
-          </a:p>
-          <a:p>
-            <a:pPr marL="914400" lvl="1" indent="-702733" algn="l" rtl="0">
-              <a:lnSpc>
-                <a:spcPct val="200000"/>
-              </a:lnSpc>
-              <a:spcBef>
-                <a:spcPts val="0"/>
-              </a:spcBef>
-              <a:spcAft>
-                <a:spcPts val="0"/>
-              </a:spcAft>
-              <a:buClr>
-                <a:schemeClr val="dk1"/>
-              </a:buClr>
-              <a:buSzPts val="7467"/>
-              <a:buFont typeface="Roboto"/>
-              <a:buChar char="○"/>
-            </a:pPr>
-            <a:r>
-              <a:rPr lang="en" dirty="0">
-                <a:solidFill>
-                  <a:schemeClr val="dk1"/>
-                </a:solidFill>
-                <a:latin typeface="Roboto"/>
-                <a:ea typeface="Roboto"/>
-                <a:cs typeface="Roboto"/>
-                <a:sym typeface="Roboto"/>
-              </a:rPr>
-              <a:t>To display guides, go to “View &gt; Guides &gt; Show guides”</a:t>
-            </a:r>
-          </a:p>
-          <a:p>
-            <a:pPr marL="457200" marR="0" lvl="0" indent="-838200" algn="l" defTabSz="914400" rtl="0" eaLnBrk="1" fontAlgn="auto" latinLnBrk="0" hangingPunct="1">
-              <a:lnSpc>
-                <a:spcPct val="200000"/>
-              </a:lnSpc>
-              <a:spcBef>
-                <a:spcPts val="0"/>
-              </a:spcBef>
-              <a:spcAft>
-                <a:spcPts val="0"/>
-              </a:spcAft>
-              <a:buClr>
-                <a:srgbClr val="000000"/>
-              </a:buClr>
-              <a:buSzPts val="9600"/>
-              <a:buFont typeface="Roboto"/>
-              <a:buChar char="●"/>
-              <a:tabLst/>
-              <a:defRPr/>
-            </a:pPr>
-            <a:r>
-              <a:rPr kumimoji="0" lang="en-US" sz="9600" b="0" i="0" u="none" strike="noStrike" kern="0" cap="none" spc="0" normalizeH="0" baseline="0" noProof="0" dirty="0">
-                <a:ln>
-                  <a:noFill/>
-                </a:ln>
-                <a:solidFill>
-                  <a:srgbClr val="000000"/>
-                </a:solidFill>
-                <a:effectLst/>
-                <a:uLnTx/>
-                <a:uFillTx/>
-                <a:latin typeface="Roboto"/>
-                <a:ea typeface="Roboto"/>
-                <a:cs typeface="Roboto"/>
-                <a:sym typeface="Roboto"/>
-              </a:rPr>
-              <a:t>Use the guidelines provided in Canvas to build your poster.  There are many examples on display on the 4</a:t>
-            </a:r>
-            <a:r>
-              <a:rPr kumimoji="0" lang="en-US" sz="9600" b="0" i="0" u="none" strike="noStrike" kern="0" cap="none" spc="0" normalizeH="0" baseline="30000" noProof="0" dirty="0">
-                <a:ln>
-                  <a:noFill/>
-                </a:ln>
-                <a:solidFill>
-                  <a:srgbClr val="000000"/>
-                </a:solidFill>
-                <a:effectLst/>
-                <a:uLnTx/>
-                <a:uFillTx/>
-                <a:latin typeface="Roboto"/>
-                <a:ea typeface="Roboto"/>
-                <a:cs typeface="Roboto"/>
-                <a:sym typeface="Roboto"/>
-              </a:rPr>
-              <a:t>th</a:t>
-            </a:r>
-            <a:r>
-              <a:rPr kumimoji="0" lang="en-US" sz="9600" b="0" i="0" u="none" strike="noStrike" kern="0" cap="none" spc="0" normalizeH="0" baseline="0" noProof="0" dirty="0">
-                <a:ln>
-                  <a:noFill/>
-                </a:ln>
-                <a:solidFill>
-                  <a:srgbClr val="000000"/>
-                </a:solidFill>
-                <a:effectLst/>
-                <a:uLnTx/>
-                <a:uFillTx/>
-                <a:latin typeface="Roboto"/>
-                <a:ea typeface="Roboto"/>
-                <a:cs typeface="Roboto"/>
-                <a:sym typeface="Roboto"/>
-              </a:rPr>
-              <a:t> floor of East Hall as well.</a:t>
-            </a:r>
-          </a:p>
-        </p:txBody>
-      </p:sp>
-    </p:spTree>
-  </p:cSld>
-  <p:clrMapOvr>
-    <a:masterClrMapping/>
-  </p:clrMapOvr>
-</p:sld>
-</file>
-
-<file path=ppt/slides/slide2.xml><?xml version="1.0" encoding="utf-8"?>
-<p:sld xmlns:a="http://schemas.openxmlformats.org/drawingml/2006/main" xmlns:r="http://schemas.openxmlformats.org/officeDocument/2006/relationships" xmlns:p="http://schemas.openxmlformats.org/presentationml/2006/main">
-  <p:cSld>
     <p:bg>
       <p:bgPr>
         <a:blipFill>
@@ -5786,13 +5234,13 @@
           <p:nvPr>
             <p:extLst>
               <p:ext uri="{D42A27DB-BD31-4B8C-83A1-F6EECF244321}">
-                <p14:modId xmlns:p14="http://schemas.microsoft.com/office/powerpoint/2010/main" val="1706553711"/>
+                <p14:modId xmlns:p14="http://schemas.microsoft.com/office/powerpoint/2010/main" val="3086635264"/>
               </p:ext>
             </p:extLst>
           </p:nvPr>
         </p:nvGraphicFramePr>
         <p:xfrm>
-          <a:off x="15366030" y="6702576"/>
+          <a:off x="15366030" y="6510911"/>
           <a:ext cx="11429568" cy="14239240"/>
         </p:xfrm>
         <a:graphic>
@@ -7365,7 +6813,7 @@
         </p:nvSpPr>
         <p:spPr>
           <a:xfrm>
-            <a:off x="1320800" y="6702576"/>
+            <a:off x="1487777" y="6511745"/>
             <a:ext cx="11429568" cy="7478970"/>
           </a:xfrm>
           <a:prstGeom prst="rect">
@@ -7440,7 +6888,7 @@
         </p:nvSpPr>
         <p:spPr>
           <a:xfrm>
-            <a:off x="1320800" y="15320319"/>
+            <a:off x="1487777" y="15320319"/>
             <a:ext cx="11429568" cy="6370975"/>
           </a:xfrm>
           <a:prstGeom prst="rect">
@@ -7516,8 +6964,8 @@
         </p:nvSpPr>
         <p:spPr>
           <a:xfrm>
-            <a:off x="29411261" y="7008467"/>
-            <a:ext cx="11136086" cy="4154984"/>
+            <a:off x="29411261" y="6507535"/>
+            <a:ext cx="11136086" cy="5816977"/>
           </a:xfrm>
           <a:prstGeom prst="rect">
             <a:avLst/>
@@ -7525,7 +6973,7 @@
           <a:noFill/>
         </p:spPr>
         <p:txBody>
-          <a:bodyPr wrap="square" rtlCol="0">
+          <a:bodyPr wrap="square" lIns="91440" tIns="45720" rIns="91440" bIns="45720" rtlCol="0" anchor="t">
             <a:spAutoFit/>
           </a:bodyPr>
           <a:lstStyle/>
@@ -7542,7 +6990,7 @@
             </a:pPr>
             <a:r>
               <a:rPr lang="en-US" sz="3600" dirty="0"/>
-              <a:t>Model must run on NVDIA A100 40GB</a:t>
+              <a:t>Model must run on NVDIA A100 GPU 40GB.</a:t>
             </a:r>
           </a:p>
           <a:p>
@@ -7552,7 +7000,7 @@
             </a:pPr>
             <a:r>
               <a:rPr lang="en-US" sz="3600" dirty="0"/>
-              <a:t>LLMs parameter sizes limited to 20 Billion</a:t>
+              <a:t>LLMs parameter sizes limited to 20 Billion.</a:t>
             </a:r>
           </a:p>
           <a:p>
@@ -7562,7 +7010,7 @@
             </a:pPr>
             <a:r>
               <a:rPr lang="en-US" sz="3600" dirty="0"/>
-              <a:t>Open Source, trustworthy LLMs only</a:t>
+              <a:t>Open Source, trustworthy LLMs only.</a:t>
             </a:r>
           </a:p>
           <a:p>
@@ -7572,7 +7020,7 @@
             </a:pPr>
             <a:r>
               <a:rPr lang="en-US" sz="3600" dirty="0"/>
-              <a:t>Reasonable completion speed for output</a:t>
+              <a:t>Reasonable completion speed for output.</a:t>
             </a:r>
           </a:p>
           <a:p>
@@ -7582,7 +7030,17 @@
             </a:pPr>
             <a:r>
               <a:rPr lang="en-US" sz="3600" dirty="0"/>
-              <a:t>Agents must debug and produce runnable python code</a:t>
+              <a:t>Agents must debug and produce runnable python code.</a:t>
+            </a:r>
+          </a:p>
+          <a:p>
+            <a:pPr marL="571500" indent="-571500">
+              <a:buFont typeface="Arial" panose="020B0604020202020204" pitchFamily="34" charset="0"/>
+              <a:buChar char="•"/>
+            </a:pPr>
+            <a:r>
+              <a:rPr lang="en-US" sz="3600" dirty="0"/>
+              <a:t>Agents must be able to write code to process typical file formats for bioinformatics (FASTA, FASTQ, VCF).</a:t>
             </a:r>
           </a:p>
         </p:txBody>
@@ -7602,7 +7060,7 @@
         <p:spPr>
           <a:xfrm>
             <a:off x="29411260" y="13972523"/>
-            <a:ext cx="11593286" cy="6801862"/>
+            <a:ext cx="11593286" cy="6247864"/>
           </a:xfrm>
           <a:prstGeom prst="rect">
             <a:avLst/>
@@ -7610,7 +7068,7 @@
           <a:noFill/>
         </p:spPr>
         <p:txBody>
-          <a:bodyPr wrap="square" rtlCol="0">
+          <a:bodyPr wrap="square" lIns="91440" tIns="45720" rIns="91440" bIns="45720" rtlCol="0" anchor="t">
             <a:spAutoFit/>
           </a:bodyPr>
           <a:lstStyle/>
@@ -7627,15 +7085,7 @@
             </a:pPr>
             <a:r>
               <a:rPr lang="en-US" sz="3600" dirty="0"/>
-              <a:t>We have chosen </a:t>
-            </a:r>
-            <a:r>
-              <a:rPr lang="en-US" sz="3600" dirty="0" err="1"/>
-              <a:t>StarCoder</a:t>
-            </a:r>
-            <a:r>
-              <a:rPr lang="en-US" sz="3600" dirty="0"/>
-              <a:t> for both the writing and the coding agents for system prototyping purposes. </a:t>
+              <a:t>One LLM was chosen for both writing and coding agents for current prototyping simplicity.</a:t>
             </a:r>
           </a:p>
           <a:p>
@@ -7645,7 +7095,15 @@
             </a:pPr>
             <a:r>
               <a:rPr lang="en-US" sz="3600" dirty="0"/>
-              <a:t>This choice was made to ensure prototype alignment and reduce the system’s complexity while designing and testing the overall workflow of the system. </a:t>
+              <a:t>We chose the LLM, </a:t>
+            </a:r>
+            <a:r>
+              <a:rPr lang="en-US" sz="3600" dirty="0" err="1"/>
+              <a:t>StarCoder</a:t>
+            </a:r>
+            <a:r>
+              <a:rPr lang="en-US" sz="3600" dirty="0"/>
+              <a:t>, because it is a coding focused model with adequate writing abilities.</a:t>
             </a:r>
           </a:p>
           <a:p>
@@ -7655,7 +7113,17 @@
             </a:pPr>
             <a:r>
               <a:rPr lang="en-US" sz="3600" dirty="0"/>
-              <a:t>Before testing other LLMs for our specified purposes, implementing the system with a single LLM allows us to build a robust system that links the two types of LLMs needed for our project’s purposes before attempting to try it on other LLMs.</a:t>
+              <a:t>Current LLM instructions were written to focus primarily on Python code.</a:t>
+            </a:r>
+          </a:p>
+          <a:p>
+            <a:pPr marL="571500" indent="-571500">
+              <a:buFont typeface="Arial" panose="020B0604020202020204" pitchFamily="34" charset="0"/>
+              <a:buChar char="•"/>
+            </a:pPr>
+            <a:r>
+              <a:rPr lang="en-US" sz="3600" dirty="0"/>
+              <a:t>The models will write Python code because of the vast amounts of data processing libraries and capabilities to easily work with users input.</a:t>
             </a:r>
           </a:p>
           <a:p>
